--- a/(3.23) 구출, 탈출, 복수의 플롯.pptx
+++ b/(3.23) 구출, 탈출, 복수의 플롯.pptx
@@ -17,8 +17,9 @@
     <p:sldId id="267" r:id="rId11"/>
     <p:sldId id="265" r:id="rId12"/>
     <p:sldId id="268" r:id="rId13"/>
-    <p:sldId id="270" r:id="rId14"/>
-    <p:sldId id="269" r:id="rId15"/>
+    <p:sldId id="271" r:id="rId14"/>
+    <p:sldId id="270" r:id="rId15"/>
+    <p:sldId id="269" r:id="rId16"/>
   </p:sldIdLst>
   <p:sldSz cx="12192000" cy="6858000"/>
   <p:notesSz cx="6858000" cy="9144000"/>
@@ -117,6 +118,11 @@
       </a:defRPr>
     </a:lvl9pPr>
   </p:defaultTextStyle>
+  <p:extLst>
+    <p:ext uri="{EFAFB233-063F-42B5-8137-9DF3F51BA10A}">
+      <p15:sldGuideLst xmlns:p15="http://schemas.microsoft.com/office/powerpoint/2012/main"/>
+    </p:ext>
+  </p:extLst>
 </p:presentation>
 </file>
 
@@ -251,7 +257,7 @@
           <a:p>
             <a:fld id="{06A3EECE-E8BF-4B03-ACAE-CCC313D72BEC}" type="datetimeFigureOut">
               <a:rPr lang="ko-KR" altLang="en-US" smtClean="0"/>
-              <a:t>2026-03-23</a:t>
+              <a:t>2026-03-24</a:t>
             </a:fld>
             <a:endParaRPr lang="ko-KR" altLang="en-US"/>
           </a:p>
@@ -421,7 +427,7 @@
           <a:p>
             <a:fld id="{06A3EECE-E8BF-4B03-ACAE-CCC313D72BEC}" type="datetimeFigureOut">
               <a:rPr lang="ko-KR" altLang="en-US" smtClean="0"/>
-              <a:t>2026-03-23</a:t>
+              <a:t>2026-03-24</a:t>
             </a:fld>
             <a:endParaRPr lang="ko-KR" altLang="en-US"/>
           </a:p>
@@ -601,7 +607,7 @@
           <a:p>
             <a:fld id="{06A3EECE-E8BF-4B03-ACAE-CCC313D72BEC}" type="datetimeFigureOut">
               <a:rPr lang="ko-KR" altLang="en-US" smtClean="0"/>
-              <a:t>2026-03-23</a:t>
+              <a:t>2026-03-24</a:t>
             </a:fld>
             <a:endParaRPr lang="ko-KR" altLang="en-US"/>
           </a:p>
@@ -771,7 +777,7 @@
           <a:p>
             <a:fld id="{06A3EECE-E8BF-4B03-ACAE-CCC313D72BEC}" type="datetimeFigureOut">
               <a:rPr lang="ko-KR" altLang="en-US" smtClean="0"/>
-              <a:t>2026-03-23</a:t>
+              <a:t>2026-03-24</a:t>
             </a:fld>
             <a:endParaRPr lang="ko-KR" altLang="en-US"/>
           </a:p>
@@ -1017,7 +1023,7 @@
           <a:p>
             <a:fld id="{06A3EECE-E8BF-4B03-ACAE-CCC313D72BEC}" type="datetimeFigureOut">
               <a:rPr lang="ko-KR" altLang="en-US" smtClean="0"/>
-              <a:t>2026-03-23</a:t>
+              <a:t>2026-03-24</a:t>
             </a:fld>
             <a:endParaRPr lang="ko-KR" altLang="en-US"/>
           </a:p>
@@ -1249,7 +1255,7 @@
           <a:p>
             <a:fld id="{06A3EECE-E8BF-4B03-ACAE-CCC313D72BEC}" type="datetimeFigureOut">
               <a:rPr lang="ko-KR" altLang="en-US" smtClean="0"/>
-              <a:t>2026-03-23</a:t>
+              <a:t>2026-03-24</a:t>
             </a:fld>
             <a:endParaRPr lang="ko-KR" altLang="en-US"/>
           </a:p>
@@ -1616,7 +1622,7 @@
           <a:p>
             <a:fld id="{06A3EECE-E8BF-4B03-ACAE-CCC313D72BEC}" type="datetimeFigureOut">
               <a:rPr lang="ko-KR" altLang="en-US" smtClean="0"/>
-              <a:t>2026-03-23</a:t>
+              <a:t>2026-03-24</a:t>
             </a:fld>
             <a:endParaRPr lang="ko-KR" altLang="en-US"/>
           </a:p>
@@ -1734,7 +1740,7 @@
           <a:p>
             <a:fld id="{06A3EECE-E8BF-4B03-ACAE-CCC313D72BEC}" type="datetimeFigureOut">
               <a:rPr lang="ko-KR" altLang="en-US" smtClean="0"/>
-              <a:t>2026-03-23</a:t>
+              <a:t>2026-03-24</a:t>
             </a:fld>
             <a:endParaRPr lang="ko-KR" altLang="en-US"/>
           </a:p>
@@ -1829,7 +1835,7 @@
           <a:p>
             <a:fld id="{06A3EECE-E8BF-4B03-ACAE-CCC313D72BEC}" type="datetimeFigureOut">
               <a:rPr lang="ko-KR" altLang="en-US" smtClean="0"/>
-              <a:t>2026-03-23</a:t>
+              <a:t>2026-03-24</a:t>
             </a:fld>
             <a:endParaRPr lang="ko-KR" altLang="en-US"/>
           </a:p>
@@ -2106,7 +2112,7 @@
           <a:p>
             <a:fld id="{06A3EECE-E8BF-4B03-ACAE-CCC313D72BEC}" type="datetimeFigureOut">
               <a:rPr lang="ko-KR" altLang="en-US" smtClean="0"/>
-              <a:t>2026-03-23</a:t>
+              <a:t>2026-03-24</a:t>
             </a:fld>
             <a:endParaRPr lang="ko-KR" altLang="en-US"/>
           </a:p>
@@ -2359,7 +2365,7 @@
           <a:p>
             <a:fld id="{06A3EECE-E8BF-4B03-ACAE-CCC313D72BEC}" type="datetimeFigureOut">
               <a:rPr lang="ko-KR" altLang="en-US" smtClean="0"/>
-              <a:t>2026-03-23</a:t>
+              <a:t>2026-03-24</a:t>
             </a:fld>
             <a:endParaRPr lang="ko-KR" altLang="en-US"/>
           </a:p>
@@ -2572,7 +2578,7 @@
           <a:p>
             <a:fld id="{06A3EECE-E8BF-4B03-ACAE-CCC313D72BEC}" type="datetimeFigureOut">
               <a:rPr lang="ko-KR" altLang="en-US" smtClean="0"/>
-              <a:t>2026-03-23</a:t>
+              <a:t>2026-03-24</a:t>
             </a:fld>
             <a:endParaRPr lang="ko-KR" altLang="en-US"/>
           </a:p>
@@ -3068,7 +3074,6 @@
               <a:rPr lang="en-US" altLang="ko-KR" smtClean="0"/>
               <a:t>(A)</a:t>
             </a:r>
-            <a:endParaRPr lang="en-US" altLang="ko-KR" smtClean="0"/>
           </a:p>
           <a:p>
             <a:r>
@@ -3474,7 +3479,7 @@
         <p:spPr>
           <a:xfrm>
             <a:off x="838200" y="1690688"/>
-            <a:ext cx="10515600" cy="4830428"/>
+            <a:ext cx="10515600" cy="5167311"/>
           </a:xfrm>
         </p:spPr>
         <p:txBody>
@@ -3535,7 +3540,7 @@
             <a:pPr lvl="1"/>
             <a:r>
               <a:rPr lang="ko-KR" altLang="en-US" smtClean="0"/>
-              <a:t>핏줄</a:t>
+              <a:t>친족 </a:t>
             </a:r>
             <a:r>
               <a:rPr lang="en-US" altLang="ko-KR" smtClean="0"/>
@@ -3543,7 +3548,15 @@
             </a:r>
             <a:r>
               <a:rPr lang="ko-KR" altLang="en-US" smtClean="0"/>
-              <a:t>부모 </a:t>
+              <a:t>부모</a:t>
+            </a:r>
+            <a:r>
+              <a:rPr lang="en-US" altLang="ko-KR" smtClean="0"/>
+              <a:t>, </a:t>
+            </a:r>
+            <a:r>
+              <a:rPr lang="ko-KR" altLang="en-US" smtClean="0"/>
+              <a:t>자식 </a:t>
             </a:r>
             <a:r>
               <a:rPr lang="en-US" altLang="ko-KR" smtClean="0"/>
@@ -3565,6 +3578,18 @@
               <a:rPr lang="en-US" altLang="ko-KR" smtClean="0"/>
               <a:t>.</a:t>
             </a:r>
+            <a:br>
+              <a:rPr lang="en-US" altLang="ko-KR" smtClean="0"/>
+            </a:br>
+            <a:r>
+              <a:rPr lang="ko-KR" altLang="en-US" smtClean="0"/>
+              <a:t>친족이 아주 악당이 아닌 이상 살인하지 않는다</a:t>
+            </a:r>
+            <a:r>
+              <a:rPr lang="en-US" altLang="ko-KR" smtClean="0"/>
+              <a:t>.</a:t>
+            </a:r>
+            <a:endParaRPr lang="en-US" altLang="ko-KR" smtClean="0"/>
           </a:p>
           <a:p>
             <a:r>
@@ -3603,7 +3628,7 @@
             </a:r>
             <a:r>
               <a:rPr lang="ko-KR" altLang="en-US" smtClean="0"/>
-              <a:t>갈취</a:t>
+              <a:t>방화</a:t>
             </a:r>
             <a:r>
               <a:rPr lang="en-US" altLang="ko-KR" smtClean="0"/>
@@ -3626,18 +3651,38 @@
           <a:p>
             <a:r>
               <a:rPr lang="ko-KR" altLang="en-US" smtClean="0"/>
-              <a:t>이 이야기에서는 처절한 범죄의 현장에서</a:t>
-            </a:r>
-            <a:r>
-              <a:rPr lang="en-US" altLang="ko-KR" smtClean="0"/>
+              <a:t>이 이야기에서는 </a:t>
+            </a:r>
+            <a:r>
+              <a:rPr lang="ko-KR" altLang="en-US" b="1" smtClean="0">
+                <a:solidFill>
+                  <a:srgbClr val="FF0000"/>
+                </a:solidFill>
+              </a:rPr>
+              <a:t>처절한 범죄의 현장에서</a:t>
+            </a:r>
+            <a:r>
+              <a:rPr lang="en-US" altLang="ko-KR" b="1" smtClean="0">
+                <a:solidFill>
+                  <a:srgbClr val="FF0000"/>
+                </a:solidFill>
+              </a:rPr>
               <a:t>, </a:t>
             </a:r>
             <a:r>
-              <a:rPr lang="ko-KR" altLang="en-US" smtClean="0"/>
-              <a:t>처절하고 잔인하게 당하는 피해자로서의 주인공을 보여준다</a:t>
-            </a:r>
-            <a:r>
-              <a:rPr lang="en-US" altLang="ko-KR" smtClean="0"/>
+              <a:rPr lang="ko-KR" altLang="en-US" b="1" smtClean="0">
+                <a:solidFill>
+                  <a:srgbClr val="FF0000"/>
+                </a:solidFill>
+              </a:rPr>
+              <a:t>처절하고 잔인하게 당하는 피해자로서의 주인공</a:t>
+            </a:r>
+            <a:r>
+              <a:rPr lang="ko-KR" altLang="en-US" b="1" smtClean="0"/>
+              <a:t>을 보여준다</a:t>
+            </a:r>
+            <a:r>
+              <a:rPr lang="en-US" altLang="ko-KR" b="1" smtClean="0"/>
               <a:t>.</a:t>
             </a:r>
           </a:p>
@@ -3700,6 +3745,259 @@
           <a:lstStyle/>
           <a:p>
             <a:r>
+              <a:rPr lang="ko-KR" altLang="en-US" smtClean="0"/>
+              <a:t>복수의 플롯의 진행</a:t>
+            </a:r>
+            <a:endParaRPr lang="ko-KR" altLang="en-US"/>
+          </a:p>
+        </p:txBody>
+      </p:sp>
+      <p:sp>
+        <p:nvSpPr>
+          <p:cNvPr id="3" name="내용 개체 틀 2"/>
+          <p:cNvSpPr>
+            <a:spLocks noGrp="1"/>
+          </p:cNvSpPr>
+          <p:nvPr>
+            <p:ph idx="1"/>
+          </p:nvPr>
+        </p:nvSpPr>
+        <p:spPr>
+          <a:xfrm>
+            <a:off x="838200" y="1690688"/>
+            <a:ext cx="10515600" cy="5167311"/>
+          </a:xfrm>
+        </p:spPr>
+        <p:txBody>
+          <a:bodyPr>
+            <a:normAutofit fontScale="92500" lnSpcReduction="10000"/>
+          </a:bodyPr>
+          <a:lstStyle/>
+          <a:p>
+            <a:r>
+              <a:rPr lang="ko-KR" altLang="en-US" smtClean="0"/>
+              <a:t>도입 부분</a:t>
+            </a:r>
+            <a:endParaRPr lang="en-US" altLang="ko-KR" smtClean="0"/>
+          </a:p>
+          <a:p>
+            <a:pPr marL="914400" lvl="1" indent="-457200">
+              <a:buFont typeface="+mj-lt"/>
+              <a:buAutoNum type="arabicPeriod"/>
+            </a:pPr>
+            <a:r>
+              <a:rPr lang="ko-KR" altLang="en-US" smtClean="0"/>
+              <a:t>주인공의 스펙</a:t>
+            </a:r>
+            <a:r>
+              <a:rPr lang="en-US" altLang="ko-KR" smtClean="0"/>
+              <a:t>, </a:t>
+            </a:r>
+            <a:r>
+              <a:rPr lang="ko-KR" altLang="en-US" smtClean="0"/>
+              <a:t>외형</a:t>
+            </a:r>
+            <a:r>
+              <a:rPr lang="en-US" altLang="ko-KR" smtClean="0"/>
+              <a:t>, </a:t>
+            </a:r>
+            <a:r>
+              <a:rPr lang="ko-KR" altLang="en-US" smtClean="0"/>
+              <a:t>외모</a:t>
+            </a:r>
+            <a:endParaRPr lang="en-US" altLang="ko-KR" smtClean="0"/>
+          </a:p>
+          <a:p>
+            <a:pPr marL="914400" lvl="1" indent="-457200">
+              <a:buFont typeface="+mj-lt"/>
+              <a:buAutoNum type="arabicPeriod"/>
+            </a:pPr>
+            <a:r>
+              <a:rPr lang="ko-KR" altLang="en-US" smtClean="0"/>
+              <a:t>주인공이 누명을 쓴 장면</a:t>
+            </a:r>
+            <a:endParaRPr lang="en-US" altLang="ko-KR" smtClean="0"/>
+          </a:p>
+          <a:p>
+            <a:pPr lvl="1"/>
+            <a:r>
+              <a:rPr lang="ko-KR" altLang="en-US" smtClean="0"/>
+              <a:t>이런 장면 등 주인공이 처절하고 잔혹하게 당하는 모습을 보여줘야 함</a:t>
+            </a:r>
+            <a:endParaRPr lang="en-US" altLang="ko-KR"/>
+          </a:p>
+          <a:p>
+            <a:endParaRPr lang="en-US" altLang="ko-KR" smtClean="0"/>
+          </a:p>
+          <a:p>
+            <a:r>
+              <a:rPr lang="ko-KR" altLang="en-US" smtClean="0"/>
+              <a:t>감옥</a:t>
+            </a:r>
+            <a:r>
+              <a:rPr lang="en-US" altLang="ko-KR" smtClean="0"/>
+              <a:t>, (</a:t>
+            </a:r>
+            <a:r>
+              <a:rPr lang="ko-KR" altLang="en-US" smtClean="0"/>
+              <a:t>정신</a:t>
+            </a:r>
+            <a:r>
+              <a:rPr lang="en-US" altLang="ko-KR" smtClean="0"/>
+              <a:t>)</a:t>
+            </a:r>
+            <a:r>
+              <a:rPr lang="ko-KR" altLang="en-US" smtClean="0"/>
+              <a:t>병원</a:t>
+            </a:r>
+            <a:r>
+              <a:rPr lang="en-US" altLang="ko-KR" smtClean="0"/>
+              <a:t>, </a:t>
+            </a:r>
+            <a:r>
+              <a:rPr lang="ko-KR" altLang="en-US" smtClean="0"/>
+              <a:t>낯선 장소 생활의 처절함</a:t>
+            </a:r>
+            <a:r>
+              <a:rPr lang="en-US" altLang="ko-KR" smtClean="0"/>
+              <a:t/>
+            </a:r>
+            <a:br>
+              <a:rPr lang="en-US" altLang="ko-KR" smtClean="0"/>
+            </a:br>
+            <a:r>
+              <a:rPr lang="en-US" altLang="ko-KR" smtClean="0"/>
+              <a:t>but </a:t>
+            </a:r>
+            <a:r>
+              <a:rPr lang="ko-KR" altLang="en-US" smtClean="0"/>
+              <a:t>이는 필수 </a:t>
+            </a:r>
+            <a:r>
+              <a:rPr lang="en-US" altLang="ko-KR" smtClean="0"/>
+              <a:t>x</a:t>
+            </a:r>
+          </a:p>
+          <a:p>
+            <a:r>
+              <a:rPr lang="ko-KR" altLang="en-US" smtClean="0"/>
+              <a:t>이러한 장소들에서 복수를 </a:t>
+            </a:r>
+            <a:r>
+              <a:rPr lang="en-US" altLang="ko-KR" smtClean="0"/>
+              <a:t>‘</a:t>
+            </a:r>
+            <a:r>
+              <a:rPr lang="ko-KR" altLang="en-US" smtClean="0"/>
+              <a:t>준비</a:t>
+            </a:r>
+            <a:r>
+              <a:rPr lang="en-US" altLang="ko-KR" smtClean="0"/>
+              <a:t>＇</a:t>
+            </a:r>
+            <a:r>
+              <a:rPr lang="ko-KR" altLang="en-US" smtClean="0"/>
+              <a:t>하는 장면이 더 중요</a:t>
+            </a:r>
+            <a:endParaRPr lang="en-US" altLang="ko-KR" smtClean="0"/>
+          </a:p>
+          <a:p>
+            <a:r>
+              <a:rPr lang="ko-KR" altLang="en-US" smtClean="0"/>
+              <a:t>관객이 잔혹한</a:t>
+            </a:r>
+            <a:r>
+              <a:rPr lang="en-US" altLang="ko-KR" smtClean="0"/>
+              <a:t>, </a:t>
+            </a:r>
+            <a:r>
+              <a:rPr lang="ko-KR" altLang="en-US" smtClean="0"/>
+              <a:t>위법 행위를 하는 주인공을 응원하는 마음이 계속 이어지게 해야 한다</a:t>
+            </a:r>
+            <a:r>
+              <a:rPr lang="en-US" altLang="ko-KR" smtClean="0"/>
+              <a:t>.</a:t>
+            </a:r>
+            <a:endParaRPr lang="en-US" altLang="ko-KR"/>
+          </a:p>
+          <a:p>
+            <a:r>
+              <a:rPr lang="ko-KR" altLang="en-US" smtClean="0"/>
+              <a:t>관객이 주인공을 응원하는 마음을 관리하기 위해</a:t>
+            </a:r>
+            <a:r>
+              <a:rPr lang="en-US" altLang="ko-KR"/>
+              <a:t/>
+            </a:r>
+            <a:br>
+              <a:rPr lang="en-US" altLang="ko-KR"/>
+            </a:br>
+            <a:r>
+              <a:rPr lang="ko-KR" altLang="en-US" smtClean="0"/>
+              <a:t>조력자가 당하는 모습</a:t>
+            </a:r>
+            <a:r>
+              <a:rPr lang="en-US" altLang="ko-KR" smtClean="0"/>
+              <a:t>, </a:t>
+            </a:r>
+            <a:r>
+              <a:rPr lang="ko-KR" altLang="en-US" smtClean="0"/>
+              <a:t>악당이 악행을 또 저지르는 모습을 보여줄 수 있다</a:t>
+            </a:r>
+            <a:r>
+              <a:rPr lang="en-US" altLang="ko-KR" smtClean="0"/>
+              <a:t>.</a:t>
+            </a:r>
+            <a:endParaRPr lang="ko-KR" altLang="en-US"/>
+          </a:p>
+        </p:txBody>
+      </p:sp>
+    </p:spTree>
+    <p:extLst>
+      <p:ext uri="{BB962C8B-B14F-4D97-AF65-F5344CB8AC3E}">
+        <p14:creationId xmlns:p14="http://schemas.microsoft.com/office/powerpoint/2010/main" val="4101256900"/>
+      </p:ext>
+    </p:extLst>
+  </p:cSld>
+  <p:clrMapOvr>
+    <a:masterClrMapping/>
+  </p:clrMapOvr>
+</p:sld>
+</file>
+
+<file path=ppt/slides/slide14.xml><?xml version="1.0" encoding="utf-8"?>
+<p:sld xmlns:a="http://schemas.openxmlformats.org/drawingml/2006/main" xmlns:r="http://schemas.openxmlformats.org/officeDocument/2006/relationships" xmlns:p="http://schemas.openxmlformats.org/presentationml/2006/main">
+  <p:cSld>
+    <p:spTree>
+      <p:nvGrpSpPr>
+        <p:cNvPr id="1" name=""/>
+        <p:cNvGrpSpPr/>
+        <p:nvPr/>
+      </p:nvGrpSpPr>
+      <p:grpSpPr>
+        <a:xfrm>
+          <a:off x="0" y="0"/>
+          <a:ext cx="0" cy="0"/>
+          <a:chOff x="0" y="0"/>
+          <a:chExt cx="0" cy="0"/>
+        </a:xfrm>
+      </p:grpSpPr>
+      <p:sp>
+        <p:nvSpPr>
+          <p:cNvPr id="2" name="제목 1"/>
+          <p:cNvSpPr>
+            <a:spLocks noGrp="1"/>
+          </p:cNvSpPr>
+          <p:nvPr>
+            <p:ph type="title"/>
+          </p:nvPr>
+        </p:nvSpPr>
+        <p:spPr/>
+        <p:txBody>
+          <a:bodyPr/>
+          <a:lstStyle/>
+          <a:p>
+            <a:r>
               <a:rPr lang="en-US" altLang="ko-KR" smtClean="0"/>
               <a:t>[</a:t>
             </a:r>
@@ -3762,7 +4060,7 @@
 </p:sld>
 </file>
 
-<file path=ppt/slides/slide14.xml><?xml version="1.0" encoding="utf-8"?>
+<file path=ppt/slides/slide15.xml><?xml version="1.0" encoding="utf-8"?>
 <p:sld xmlns:a="http://schemas.openxmlformats.org/drawingml/2006/main" xmlns:r="http://schemas.openxmlformats.org/officeDocument/2006/relationships" xmlns:p="http://schemas.openxmlformats.org/presentationml/2006/main">
   <p:cSld>
     <p:spTree>
@@ -4927,7 +5225,6 @@
               <a:rPr lang="en-US" altLang="ko-KR" smtClean="0"/>
               <a:t>.</a:t>
             </a:r>
-            <a:endParaRPr lang="en-US" altLang="ko-KR" smtClean="0"/>
           </a:p>
           <a:p>
             <a:r>
